--- a/open_api_milestone_timeline_google.pptx
+++ b/open_api_milestone_timeline_google.pptx
@@ -3197,7 +3197,7 @@
               </a:defRPr>
             </a:pPr>
             <a:r>
-              <a:t>Jul 2026 → Mar 2027  ·  Click any text box or table cell to edit</a:t>
+              <a:t>Jul 2026 → Mar 2027  ·  Green = New Users  ·  Blue = Existing Users</a:t>
             </a:r>
           </a:p>
         </p:txBody>
@@ -3274,53 +3274,14 @@
       </p:sp>
       <p:sp>
         <p:nvSpPr>
-          <p:cNvPr id="7" name="TextBox 6"/>
-          <p:cNvSpPr txBox="1"/>
-          <p:nvPr/>
-        </p:nvSpPr>
-        <p:spPr>
-          <a:xfrm>
-            <a:off x="274320" y="1783080"/>
-            <a:ext cx="777240" cy="822960"/>
-          </a:xfrm>
-          <a:prstGeom prst="rect">
-            <a:avLst/>
-          </a:prstGeom>
-          <a:noFill/>
-        </p:spPr>
-        <p:txBody>
-          <a:bodyPr wrap="square">
-            <a:spAutoFit/>
-          </a:bodyPr>
-          <a:lstStyle/>
-          <a:p>
-            <a:pPr algn="r">
-              <a:defRPr sz="900" b="1" i="0">
-                <a:solidFill>
-                  <a:srgbClr val="2E9E5B"/>
-                </a:solidFill>
-              </a:defRPr>
-            </a:pPr>
-            <a:r>
-              <a:t>New</a:t>
-            </a:r>
-            <a:br/>
-            <a:r>
-              <a:t>Users</a:t>
-            </a:r>
-          </a:p>
-        </p:txBody>
-      </p:sp>
-      <p:sp>
-        <p:nvSpPr>
-          <p:cNvPr id="8" name="Rounded Rectangle 7"/>
+          <p:cNvPr id="7" name="Rounded Rectangle 6"/>
           <p:cNvSpPr/>
           <p:nvPr/>
         </p:nvSpPr>
         <p:spPr>
           <a:xfrm>
-            <a:off x="1097280" y="2148840"/>
-            <a:ext cx="9966960" cy="109728"/>
+            <a:off x="1097280" y="2697480"/>
+            <a:ext cx="9966960" cy="128016"/>
           </a:xfrm>
           <a:prstGeom prst="roundRect">
             <a:avLst>
@@ -3358,14 +3319,14 @@
       </p:sp>
       <p:sp>
         <p:nvSpPr>
-          <p:cNvPr id="9" name="Rounded Rectangle 8"/>
+          <p:cNvPr id="8" name="Rounded Rectangle 7"/>
           <p:cNvSpPr/>
           <p:nvPr/>
         </p:nvSpPr>
         <p:spPr>
           <a:xfrm>
-            <a:off x="1097280" y="2148840"/>
-            <a:ext cx="498348" cy="109728"/>
+            <a:off x="1097280" y="2697480"/>
+            <a:ext cx="4186123" cy="128016"/>
           </a:xfrm>
           <a:prstGeom prst="roundRect">
             <a:avLst>
@@ -3403,20 +3364,22 @@
       </p:sp>
       <p:sp>
         <p:nvSpPr>
-          <p:cNvPr id="10" name="Oval 9"/>
+          <p:cNvPr id="9" name="Rounded Rectangle 8"/>
           <p:cNvSpPr/>
           <p:nvPr/>
         </p:nvSpPr>
         <p:spPr>
           <a:xfrm>
-            <a:off x="1495044" y="2103120"/>
-            <a:ext cx="201168" cy="201168"/>
-          </a:xfrm>
-          <a:prstGeom prst="ellipse">
-            <a:avLst/>
+            <a:off x="5283403" y="2697480"/>
+            <a:ext cx="5780837" cy="128016"/>
+          </a:xfrm>
+          <a:prstGeom prst="roundRect">
+            <a:avLst>
+              <a:gd name="adj" fmla="val 50000"/>
+            </a:avLst>
           </a:prstGeom>
           <a:solidFill>
-            <a:srgbClr val="2E9E5B"/>
+            <a:srgbClr val="1B4F8A"/>
           </a:solidFill>
           <a:ln>
             <a:noFill/>
@@ -3446,14 +3409,14 @@
       </p:sp>
       <p:sp>
         <p:nvSpPr>
-          <p:cNvPr id="11" name="TextBox 10"/>
+          <p:cNvPr id="10" name="TextBox 9"/>
           <p:cNvSpPr txBox="1"/>
           <p:nvPr/>
         </p:nvSpPr>
         <p:spPr>
           <a:xfrm>
-            <a:off x="1001268" y="1847088"/>
-            <a:ext cx="1188720" cy="256032"/>
+            <a:off x="228600" y="2514600"/>
+            <a:ext cx="822960" cy="457200"/>
           </a:xfrm>
           <a:prstGeom prst="rect">
             <a:avLst/>
@@ -3466,41 +3429,43 @@
           </a:bodyPr>
           <a:lstStyle/>
           <a:p>
-            <a:pPr algn="ctr">
+            <a:pPr algn="r">
               <a:defRPr sz="900" b="1" i="0">
                 <a:solidFill>
-                  <a:srgbClr val="2E9E5B"/>
+                  <a:srgbClr val="1E293B"/>
                 </a:solidFill>
               </a:defRPr>
             </a:pPr>
             <a:r>
-              <a:t>Early Q3</a:t>
-            </a:r>
-          </a:p>
-        </p:txBody>
-      </p:sp>
-      <p:sp>
-        <p:nvSpPr>
-          <p:cNvPr id="12" name="Rounded Rectangle 11"/>
+              <a:t>Open API</a:t>
+            </a:r>
+            <a:br/>
+            <a:r>
+              <a:t>Milestones</a:t>
+            </a:r>
+          </a:p>
+        </p:txBody>
+      </p:sp>
+      <p:sp>
+        <p:nvSpPr>
+          <p:cNvPr id="11" name="Oval 10"/>
           <p:cNvSpPr/>
           <p:nvPr/>
         </p:nvSpPr>
         <p:spPr>
           <a:xfrm>
-            <a:off x="406908" y="2331720"/>
-            <a:ext cx="2377440" cy="868680"/>
-          </a:xfrm>
-          <a:prstGeom prst="roundRect">
-            <a:avLst>
-              <a:gd name="adj" fmla="val 8000"/>
-            </a:avLst>
+            <a:off x="1495044" y="2660904"/>
+            <a:ext cx="201168" cy="201168"/>
+          </a:xfrm>
+          <a:prstGeom prst="ellipse">
+            <a:avLst/>
           </a:prstGeom>
           <a:solidFill>
-            <a:srgbClr val="FFFFFF"/>
+            <a:srgbClr val="2E9E5B"/>
           </a:solidFill>
-          <a:ln w="19050">
+          <a:ln w="25400">
             <a:solidFill>
-              <a:srgbClr val="2E9E5B"/>
+              <a:srgbClr val="FFFFFF"/>
             </a:solidFill>
           </a:ln>
         </p:spPr>
@@ -3528,14 +3493,14 @@
       </p:sp>
       <p:sp>
         <p:nvSpPr>
-          <p:cNvPr id="13" name="TextBox 12"/>
+          <p:cNvPr id="12" name="TextBox 11"/>
           <p:cNvSpPr txBox="1"/>
           <p:nvPr/>
         </p:nvSpPr>
         <p:spPr>
           <a:xfrm>
-            <a:off x="516636" y="2404872"/>
-            <a:ext cx="2157984" cy="320040"/>
+            <a:off x="1001268" y="2240280"/>
+            <a:ext cx="1188720" cy="256032"/>
           </a:xfrm>
           <a:prstGeom prst="rect">
             <a:avLst/>
@@ -3556,106 +3521,34 @@
               </a:defRPr>
             </a:pPr>
             <a:r>
-              <a:t>Block API usage by registration date</a:t>
-            </a:r>
-          </a:p>
-        </p:txBody>
-      </p:sp>
-      <p:sp>
-        <p:nvSpPr>
-          <p:cNvPr id="14" name="TextBox 13"/>
-          <p:cNvSpPr txBox="1"/>
-          <p:nvPr/>
-        </p:nvSpPr>
-        <p:spPr>
-          <a:xfrm>
-            <a:off x="516636" y="2715768"/>
-            <a:ext cx="2157984" cy="438912"/>
-          </a:xfrm>
-          <a:prstGeom prst="rect">
-            <a:avLst/>
-          </a:prstGeom>
-          <a:noFill/>
-        </p:spPr>
-        <p:txBody>
-          <a:bodyPr wrap="square">
-            <a:spAutoFit/>
-          </a:bodyPr>
-          <a:lstStyle/>
-          <a:p>
-            <a:pPr algn="ctr">
-              <a:defRPr sz="800" b="0" i="1">
-                <a:solidFill>
-                  <a:srgbClr val="1E293B"/>
-                </a:solidFill>
-              </a:defRPr>
-            </a:pPr>
-            <a:r>
-              <a:t>By registration date, block API usage for new users</a:t>
-            </a:r>
-          </a:p>
-        </p:txBody>
-      </p:sp>
-      <p:sp>
-        <p:nvSpPr>
-          <p:cNvPr id="15" name="TextBox 14"/>
-          <p:cNvSpPr txBox="1"/>
-          <p:nvPr/>
-        </p:nvSpPr>
-        <p:spPr>
-          <a:xfrm>
-            <a:off x="274320" y="3703319"/>
-            <a:ext cx="777240" cy="822960"/>
-          </a:xfrm>
-          <a:prstGeom prst="rect">
-            <a:avLst/>
-          </a:prstGeom>
-          <a:noFill/>
-        </p:spPr>
-        <p:txBody>
-          <a:bodyPr wrap="square">
-            <a:spAutoFit/>
-          </a:bodyPr>
-          <a:lstStyle/>
-          <a:p>
-            <a:pPr algn="r">
-              <a:defRPr sz="900" b="1" i="0">
-                <a:solidFill>
-                  <a:srgbClr val="1B4F8A"/>
-                </a:solidFill>
-              </a:defRPr>
-            </a:pPr>
-            <a:r>
-              <a:t>Existing</a:t>
-            </a:r>
-            <a:br/>
-            <a:r>
-              <a:t>Users</a:t>
-            </a:r>
-          </a:p>
-        </p:txBody>
-      </p:sp>
-      <p:sp>
-        <p:nvSpPr>
-          <p:cNvPr id="16" name="Rounded Rectangle 15"/>
+              <a:t>Early Q3</a:t>
+            </a:r>
+          </a:p>
+        </p:txBody>
+      </p:sp>
+      <p:sp>
+        <p:nvSpPr>
+          <p:cNvPr id="13" name="Rounded Rectangle 12"/>
           <p:cNvSpPr/>
           <p:nvPr/>
         </p:nvSpPr>
         <p:spPr>
           <a:xfrm>
-            <a:off x="1097280" y="4069079"/>
-            <a:ext cx="9966960" cy="109728"/>
+            <a:off x="406908" y="2450592"/>
+            <a:ext cx="2377440" cy="960120"/>
           </a:xfrm>
           <a:prstGeom prst="roundRect">
             <a:avLst>
-              <a:gd name="adj" fmla="val 50000"/>
+              <a:gd name="adj" fmla="val 8000"/>
             </a:avLst>
           </a:prstGeom>
           <a:solidFill>
-            <a:srgbClr val="D1D5DB"/>
+            <a:srgbClr val="FFFFFF"/>
           </a:solidFill>
-          <a:ln>
-            <a:noFill/>
+          <a:ln w="19050">
+            <a:solidFill>
+              <a:srgbClr val="2E9E5B"/>
+            </a:solidFill>
           </a:ln>
         </p:spPr>
         <p:style>
@@ -3682,25 +3575,130 @@
       </p:sp>
       <p:sp>
         <p:nvSpPr>
-          <p:cNvPr id="17" name="Rounded Rectangle 16"/>
+          <p:cNvPr id="14" name="TextBox 13"/>
+          <p:cNvSpPr txBox="1"/>
+          <p:nvPr/>
+        </p:nvSpPr>
+        <p:spPr>
+          <a:xfrm>
+            <a:off x="516636" y="2505456"/>
+            <a:ext cx="2157984" cy="201168"/>
+          </a:xfrm>
+          <a:prstGeom prst="rect">
+            <a:avLst/>
+          </a:prstGeom>
+          <a:noFill/>
+        </p:spPr>
+        <p:txBody>
+          <a:bodyPr wrap="square">
+            <a:spAutoFit/>
+          </a:bodyPr>
+          <a:lstStyle/>
+          <a:p>
+            <a:pPr algn="ctr">
+              <a:defRPr sz="800" b="1" i="0">
+                <a:solidFill>
+                  <a:srgbClr val="2E9E5B"/>
+                </a:solidFill>
+              </a:defRPr>
+            </a:pPr>
+            <a:r>
+              <a:t>New Users</a:t>
+            </a:r>
+          </a:p>
+        </p:txBody>
+      </p:sp>
+      <p:sp>
+        <p:nvSpPr>
+          <p:cNvPr id="15" name="TextBox 14"/>
+          <p:cNvSpPr txBox="1"/>
+          <p:nvPr/>
+        </p:nvSpPr>
+        <p:spPr>
+          <a:xfrm>
+            <a:off x="516636" y="2706624"/>
+            <a:ext cx="2157984" cy="320040"/>
+          </a:xfrm>
+          <a:prstGeom prst="rect">
+            <a:avLst/>
+          </a:prstGeom>
+          <a:noFill/>
+        </p:spPr>
+        <p:txBody>
+          <a:bodyPr wrap="square">
+            <a:spAutoFit/>
+          </a:bodyPr>
+          <a:lstStyle/>
+          <a:p>
+            <a:pPr algn="ctr">
+              <a:defRPr sz="900" b="1" i="0">
+                <a:solidFill>
+                  <a:srgbClr val="2E9E5B"/>
+                </a:solidFill>
+              </a:defRPr>
+            </a:pPr>
+            <a:r>
+              <a:t>Block API usage by registration date</a:t>
+            </a:r>
+          </a:p>
+        </p:txBody>
+      </p:sp>
+      <p:sp>
+        <p:nvSpPr>
+          <p:cNvPr id="16" name="TextBox 15"/>
+          <p:cNvSpPr txBox="1"/>
+          <p:nvPr/>
+        </p:nvSpPr>
+        <p:spPr>
+          <a:xfrm>
+            <a:off x="516636" y="3017520"/>
+            <a:ext cx="2157984" cy="347472"/>
+          </a:xfrm>
+          <a:prstGeom prst="rect">
+            <a:avLst/>
+          </a:prstGeom>
+          <a:noFill/>
+        </p:spPr>
+        <p:txBody>
+          <a:bodyPr wrap="square">
+            <a:spAutoFit/>
+          </a:bodyPr>
+          <a:lstStyle/>
+          <a:p>
+            <a:pPr algn="ctr">
+              <a:defRPr sz="800" b="0" i="1">
+                <a:solidFill>
+                  <a:srgbClr val="1E293B"/>
+                </a:solidFill>
+              </a:defRPr>
+            </a:pPr>
+            <a:r>
+              <a:t>By registration date, block API usage for new users</a:t>
+            </a:r>
+          </a:p>
+        </p:txBody>
+      </p:sp>
+      <p:sp>
+        <p:nvSpPr>
+          <p:cNvPr id="17" name="Oval 16"/>
           <p:cNvSpPr/>
           <p:nvPr/>
         </p:nvSpPr>
         <p:spPr>
           <a:xfrm>
-            <a:off x="1097280" y="4069079"/>
-            <a:ext cx="9468612" cy="109728"/>
-          </a:xfrm>
-          <a:prstGeom prst="roundRect">
-            <a:avLst>
-              <a:gd name="adj" fmla="val 50000"/>
-            </a:avLst>
+            <a:off x="5182819" y="2660904"/>
+            <a:ext cx="201168" cy="201168"/>
+          </a:xfrm>
+          <a:prstGeom prst="ellipse">
+            <a:avLst/>
           </a:prstGeom>
           <a:solidFill>
             <a:srgbClr val="1B4F8A"/>
           </a:solidFill>
-          <a:ln>
-            <a:noFill/>
+          <a:ln w="25400">
+            <a:solidFill>
+              <a:srgbClr val="FFFFFF"/>
+            </a:solidFill>
           </a:ln>
         </p:spPr>
         <p:style>
@@ -3727,23 +3725,62 @@
       </p:sp>
       <p:sp>
         <p:nvSpPr>
-          <p:cNvPr id="18" name="Oval 17"/>
+          <p:cNvPr id="18" name="TextBox 17"/>
+          <p:cNvSpPr txBox="1"/>
+          <p:nvPr/>
+        </p:nvSpPr>
+        <p:spPr>
+          <a:xfrm>
+            <a:off x="4689043" y="3017520"/>
+            <a:ext cx="1188720" cy="256032"/>
+          </a:xfrm>
+          <a:prstGeom prst="rect">
+            <a:avLst/>
+          </a:prstGeom>
+          <a:noFill/>
+        </p:spPr>
+        <p:txBody>
+          <a:bodyPr wrap="square">
+            <a:spAutoFit/>
+          </a:bodyPr>
+          <a:lstStyle/>
+          <a:p>
+            <a:pPr algn="ctr">
+              <a:defRPr sz="900" b="1" i="0">
+                <a:solidFill>
+                  <a:srgbClr val="1B4F8A"/>
+                </a:solidFill>
+              </a:defRPr>
+            </a:pPr>
+            <a:r>
+              <a:t>Beginning of Sept</a:t>
+            </a:r>
+          </a:p>
+        </p:txBody>
+      </p:sp>
+      <p:sp>
+        <p:nvSpPr>
+          <p:cNvPr id="19" name="Rounded Rectangle 18"/>
           <p:cNvSpPr/>
           <p:nvPr/>
         </p:nvSpPr>
         <p:spPr>
           <a:xfrm>
-            <a:off x="5182819" y="4023359"/>
-            <a:ext cx="201168" cy="201168"/>
-          </a:xfrm>
-          <a:prstGeom prst="ellipse">
-            <a:avLst/>
+            <a:off x="4094683" y="3200400"/>
+            <a:ext cx="2377440" cy="960120"/>
+          </a:xfrm>
+          <a:prstGeom prst="roundRect">
+            <a:avLst>
+              <a:gd name="adj" fmla="val 8000"/>
+            </a:avLst>
           </a:prstGeom>
           <a:solidFill>
-            <a:srgbClr val="1B4F8A"/>
+            <a:srgbClr val="FFFFFF"/>
           </a:solidFill>
-          <a:ln>
-            <a:noFill/>
+          <a:ln w="19050">
+            <a:solidFill>
+              <a:srgbClr val="1B4F8A"/>
+            </a:solidFill>
           </a:ln>
         </p:spPr>
         <p:style>
@@ -3770,14 +3807,49 @@
       </p:sp>
       <p:sp>
         <p:nvSpPr>
-          <p:cNvPr id="19" name="TextBox 18"/>
+          <p:cNvPr id="20" name="TextBox 19"/>
           <p:cNvSpPr txBox="1"/>
           <p:nvPr/>
         </p:nvSpPr>
         <p:spPr>
           <a:xfrm>
-            <a:off x="4689043" y="3767327"/>
-            <a:ext cx="1188720" cy="256032"/>
+            <a:off x="4204411" y="3255264"/>
+            <a:ext cx="2157984" cy="201168"/>
+          </a:xfrm>
+          <a:prstGeom prst="rect">
+            <a:avLst/>
+          </a:prstGeom>
+          <a:noFill/>
+        </p:spPr>
+        <p:txBody>
+          <a:bodyPr wrap="square">
+            <a:spAutoFit/>
+          </a:bodyPr>
+          <a:lstStyle/>
+          <a:p>
+            <a:pPr algn="ctr">
+              <a:defRPr sz="800" b="1" i="0">
+                <a:solidFill>
+                  <a:srgbClr val="1B4F8A"/>
+                </a:solidFill>
+              </a:defRPr>
+            </a:pPr>
+            <a:r>
+              <a:t>Existing Users</a:t>
+            </a:r>
+          </a:p>
+        </p:txBody>
+      </p:sp>
+      <p:sp>
+        <p:nvSpPr>
+          <p:cNvPr id="21" name="TextBox 20"/>
+          <p:cNvSpPr txBox="1"/>
+          <p:nvPr/>
+        </p:nvSpPr>
+        <p:spPr>
+          <a:xfrm>
+            <a:off x="4204411" y="3456432"/>
+            <a:ext cx="2157984" cy="320040"/>
           </a:xfrm>
           <a:prstGeom prst="rect">
             <a:avLst/>
@@ -3798,33 +3870,66 @@
               </a:defRPr>
             </a:pPr>
             <a:r>
-              <a:t>Beginning of Sept</a:t>
-            </a:r>
-          </a:p>
-        </p:txBody>
-      </p:sp>
-      <p:sp>
-        <p:nvSpPr>
-          <p:cNvPr id="20" name="Rounded Rectangle 19"/>
+              <a:t>Automated email to migrated users</a:t>
+            </a:r>
+          </a:p>
+        </p:txBody>
+      </p:sp>
+      <p:sp>
+        <p:nvSpPr>
+          <p:cNvPr id="22" name="TextBox 21"/>
+          <p:cNvSpPr txBox="1"/>
+          <p:nvPr/>
+        </p:nvSpPr>
+        <p:spPr>
+          <a:xfrm>
+            <a:off x="4204411" y="3767328"/>
+            <a:ext cx="2157984" cy="347472"/>
+          </a:xfrm>
+          <a:prstGeom prst="rect">
+            <a:avLst/>
+          </a:prstGeom>
+          <a:noFill/>
+        </p:spPr>
+        <p:txBody>
+          <a:bodyPr wrap="square">
+            <a:spAutoFit/>
+          </a:bodyPr>
+          <a:lstStyle/>
+          <a:p>
+            <a:pPr algn="ctr">
+              <a:defRPr sz="800" b="0" i="1">
+                <a:solidFill>
+                  <a:srgbClr val="1E293B"/>
+                </a:solidFill>
+              </a:defRPr>
+            </a:pPr>
+            <a:r>
+              <a:t>Start sending automated email to migrated users</a:t>
+            </a:r>
+          </a:p>
+        </p:txBody>
+      </p:sp>
+      <p:sp>
+        <p:nvSpPr>
+          <p:cNvPr id="23" name="Oval 22"/>
           <p:cNvSpPr/>
           <p:nvPr/>
         </p:nvSpPr>
         <p:spPr>
           <a:xfrm>
-            <a:off x="4094683" y="4251959"/>
-            <a:ext cx="2377440" cy="868680"/>
-          </a:xfrm>
-          <a:prstGeom prst="roundRect">
-            <a:avLst>
-              <a:gd name="adj" fmla="val 8000"/>
-            </a:avLst>
+            <a:off x="6179515" y="2660904"/>
+            <a:ext cx="201168" cy="201168"/>
+          </a:xfrm>
+          <a:prstGeom prst="ellipse">
+            <a:avLst/>
           </a:prstGeom>
           <a:solidFill>
-            <a:srgbClr val="FFFFFF"/>
+            <a:srgbClr val="1B4F8A"/>
           </a:solidFill>
-          <a:ln w="19050">
+          <a:ln w="25400">
             <a:solidFill>
-              <a:srgbClr val="1B4F8A"/>
+              <a:srgbClr val="FFFFFF"/>
             </a:solidFill>
           </a:ln>
         </p:spPr>
@@ -3852,14 +3957,14 @@
       </p:sp>
       <p:sp>
         <p:nvSpPr>
-          <p:cNvPr id="21" name="TextBox 20"/>
+          <p:cNvPr id="24" name="TextBox 23"/>
           <p:cNvSpPr txBox="1"/>
           <p:nvPr/>
         </p:nvSpPr>
         <p:spPr>
           <a:xfrm>
-            <a:off x="4204411" y="4325111"/>
-            <a:ext cx="2157984" cy="320040"/>
+            <a:off x="5685739" y="2240280"/>
+            <a:ext cx="1188720" cy="256032"/>
           </a:xfrm>
           <a:prstGeom prst="rect">
             <a:avLst/>
@@ -3880,65 +3985,34 @@
               </a:defRPr>
             </a:pPr>
             <a:r>
-              <a:t>Automated email to migrated users</a:t>
-            </a:r>
-          </a:p>
-        </p:txBody>
-      </p:sp>
-      <p:sp>
-        <p:nvSpPr>
-          <p:cNvPr id="22" name="TextBox 21"/>
-          <p:cNvSpPr txBox="1"/>
-          <p:nvPr/>
-        </p:nvSpPr>
-        <p:spPr>
-          <a:xfrm>
-            <a:off x="4204411" y="4636007"/>
-            <a:ext cx="2157984" cy="438912"/>
-          </a:xfrm>
-          <a:prstGeom prst="rect">
-            <a:avLst/>
-          </a:prstGeom>
-          <a:noFill/>
-        </p:spPr>
-        <p:txBody>
-          <a:bodyPr wrap="square">
-            <a:spAutoFit/>
-          </a:bodyPr>
-          <a:lstStyle/>
-          <a:p>
-            <a:pPr algn="ctr">
-              <a:defRPr sz="800" b="0" i="1">
-                <a:solidFill>
-                  <a:srgbClr val="1E293B"/>
-                </a:solidFill>
-              </a:defRPr>
-            </a:pPr>
-            <a:r>
-              <a:t>Start sending automated email to migrated users</a:t>
-            </a:r>
-          </a:p>
-        </p:txBody>
-      </p:sp>
-      <p:sp>
-        <p:nvSpPr>
-          <p:cNvPr id="23" name="Oval 22"/>
+              <a:t>End of September</a:t>
+            </a:r>
+          </a:p>
+        </p:txBody>
+      </p:sp>
+      <p:sp>
+        <p:nvSpPr>
+          <p:cNvPr id="25" name="Rounded Rectangle 24"/>
           <p:cNvSpPr/>
           <p:nvPr/>
         </p:nvSpPr>
         <p:spPr>
           <a:xfrm>
-            <a:off x="6179515" y="4023359"/>
-            <a:ext cx="201168" cy="201168"/>
-          </a:xfrm>
-          <a:prstGeom prst="ellipse">
-            <a:avLst/>
+            <a:off x="5091379" y="2450592"/>
+            <a:ext cx="2377440" cy="960120"/>
+          </a:xfrm>
+          <a:prstGeom prst="roundRect">
+            <a:avLst>
+              <a:gd name="adj" fmla="val 8000"/>
+            </a:avLst>
           </a:prstGeom>
           <a:solidFill>
-            <a:srgbClr val="1B4F8A"/>
+            <a:srgbClr val="FFFFFF"/>
           </a:solidFill>
-          <a:ln>
-            <a:noFill/>
+          <a:ln w="19050">
+            <a:solidFill>
+              <a:srgbClr val="1B4F8A"/>
+            </a:solidFill>
           </a:ln>
         </p:spPr>
         <p:style>
@@ -3965,14 +4039,49 @@
       </p:sp>
       <p:sp>
         <p:nvSpPr>
-          <p:cNvPr id="24" name="TextBox 23"/>
+          <p:cNvPr id="26" name="TextBox 25"/>
           <p:cNvSpPr txBox="1"/>
           <p:nvPr/>
         </p:nvSpPr>
         <p:spPr>
           <a:xfrm>
-            <a:off x="5685739" y="3767327"/>
-            <a:ext cx="1188720" cy="256032"/>
+            <a:off x="5201107" y="2505456"/>
+            <a:ext cx="2157984" cy="201168"/>
+          </a:xfrm>
+          <a:prstGeom prst="rect">
+            <a:avLst/>
+          </a:prstGeom>
+          <a:noFill/>
+        </p:spPr>
+        <p:txBody>
+          <a:bodyPr wrap="square">
+            <a:spAutoFit/>
+          </a:bodyPr>
+          <a:lstStyle/>
+          <a:p>
+            <a:pPr algn="ctr">
+              <a:defRPr sz="800" b="1" i="0">
+                <a:solidFill>
+                  <a:srgbClr val="1B4F8A"/>
+                </a:solidFill>
+              </a:defRPr>
+            </a:pPr>
+            <a:r>
+              <a:t>Existing Users</a:t>
+            </a:r>
+          </a:p>
+        </p:txBody>
+      </p:sp>
+      <p:sp>
+        <p:nvSpPr>
+          <p:cNvPr id="27" name="TextBox 26"/>
+          <p:cNvSpPr txBox="1"/>
+          <p:nvPr/>
+        </p:nvSpPr>
+        <p:spPr>
+          <a:xfrm>
+            <a:off x="5201107" y="2706624"/>
+            <a:ext cx="2157984" cy="320040"/>
           </a:xfrm>
           <a:prstGeom prst="rect">
             <a:avLst/>
@@ -3993,33 +4102,66 @@
               </a:defRPr>
             </a:pPr>
             <a:r>
-              <a:t>End of September</a:t>
-            </a:r>
-          </a:p>
-        </p:txBody>
-      </p:sp>
-      <p:sp>
-        <p:nvSpPr>
-          <p:cNvPr id="25" name="Rounded Rectangle 24"/>
+              <a:t>Communication to all users</a:t>
+            </a:r>
+          </a:p>
+        </p:txBody>
+      </p:sp>
+      <p:sp>
+        <p:nvSpPr>
+          <p:cNvPr id="28" name="TextBox 27"/>
+          <p:cNvSpPr txBox="1"/>
+          <p:nvPr/>
+        </p:nvSpPr>
+        <p:spPr>
+          <a:xfrm>
+            <a:off x="5201107" y="3017520"/>
+            <a:ext cx="2157984" cy="347472"/>
+          </a:xfrm>
+          <a:prstGeom prst="rect">
+            <a:avLst/>
+          </a:prstGeom>
+          <a:noFill/>
+        </p:spPr>
+        <p:txBody>
+          <a:bodyPr wrap="square">
+            <a:spAutoFit/>
+          </a:bodyPr>
+          <a:lstStyle/>
+          <a:p>
+            <a:pPr algn="ctr">
+              <a:defRPr sz="800" b="0" i="1">
+                <a:solidFill>
+                  <a:srgbClr val="1E293B"/>
+                </a:solidFill>
+              </a:defRPr>
+            </a:pPr>
+            <a:r>
+              <a:t>Sending communication to all users</a:t>
+            </a:r>
+          </a:p>
+        </p:txBody>
+      </p:sp>
+      <p:sp>
+        <p:nvSpPr>
+          <p:cNvPr id="29" name="Oval 28"/>
           <p:cNvSpPr/>
           <p:nvPr/>
         </p:nvSpPr>
         <p:spPr>
           <a:xfrm>
-            <a:off x="5091379" y="4251959"/>
-            <a:ext cx="2377440" cy="868680"/>
-          </a:xfrm>
-          <a:prstGeom prst="roundRect">
-            <a:avLst>
-              <a:gd name="adj" fmla="val 8000"/>
-            </a:avLst>
+            <a:off x="10465308" y="2660904"/>
+            <a:ext cx="201168" cy="201168"/>
+          </a:xfrm>
+          <a:prstGeom prst="ellipse">
+            <a:avLst/>
           </a:prstGeom>
           <a:solidFill>
-            <a:srgbClr val="FFFFFF"/>
+            <a:srgbClr val="1B4F8A"/>
           </a:solidFill>
-          <a:ln w="19050">
+          <a:ln w="25400">
             <a:solidFill>
-              <a:srgbClr val="1B4F8A"/>
+              <a:srgbClr val="FFFFFF"/>
             </a:solidFill>
           </a:ln>
         </p:spPr>
@@ -4047,14 +4189,14 @@
       </p:sp>
       <p:sp>
         <p:nvSpPr>
-          <p:cNvPr id="26" name="TextBox 25"/>
+          <p:cNvPr id="30" name="TextBox 29"/>
           <p:cNvSpPr txBox="1"/>
           <p:nvPr/>
         </p:nvSpPr>
         <p:spPr>
           <a:xfrm>
-            <a:off x="5201107" y="4325111"/>
-            <a:ext cx="2157984" cy="320040"/>
+            <a:off x="9971532" y="3017520"/>
+            <a:ext cx="1188720" cy="256032"/>
           </a:xfrm>
           <a:prstGeom prst="rect">
             <a:avLst/>
@@ -4075,65 +4217,34 @@
               </a:defRPr>
             </a:pPr>
             <a:r>
-              <a:t>Communication to all users</a:t>
-            </a:r>
-          </a:p>
-        </p:txBody>
-      </p:sp>
-      <p:sp>
-        <p:nvSpPr>
-          <p:cNvPr id="27" name="TextBox 26"/>
-          <p:cNvSpPr txBox="1"/>
-          <p:nvPr/>
-        </p:nvSpPr>
-        <p:spPr>
-          <a:xfrm>
-            <a:off x="5201107" y="4636007"/>
-            <a:ext cx="2157984" cy="438912"/>
-          </a:xfrm>
-          <a:prstGeom prst="rect">
-            <a:avLst/>
-          </a:prstGeom>
-          <a:noFill/>
-        </p:spPr>
-        <p:txBody>
-          <a:bodyPr wrap="square">
-            <a:spAutoFit/>
-          </a:bodyPr>
-          <a:lstStyle/>
-          <a:p>
-            <a:pPr algn="ctr">
-              <a:defRPr sz="800" b="0" i="1">
-                <a:solidFill>
-                  <a:srgbClr val="1E293B"/>
-                </a:solidFill>
-              </a:defRPr>
-            </a:pPr>
-            <a:r>
-              <a:t>Sending communication to all users</a:t>
-            </a:r>
-          </a:p>
-        </p:txBody>
-      </p:sp>
-      <p:sp>
-        <p:nvSpPr>
-          <p:cNvPr id="28" name="Oval 27"/>
+              <a:t>EO March 27</a:t>
+            </a:r>
+          </a:p>
+        </p:txBody>
+      </p:sp>
+      <p:sp>
+        <p:nvSpPr>
+          <p:cNvPr id="31" name="Rounded Rectangle 30"/>
           <p:cNvSpPr/>
           <p:nvPr/>
         </p:nvSpPr>
         <p:spPr>
           <a:xfrm>
-            <a:off x="10465308" y="4023359"/>
-            <a:ext cx="201168" cy="201168"/>
-          </a:xfrm>
-          <a:prstGeom prst="ellipse">
-            <a:avLst/>
+            <a:off x="9377172" y="3200400"/>
+            <a:ext cx="2377440" cy="960120"/>
+          </a:xfrm>
+          <a:prstGeom prst="roundRect">
+            <a:avLst>
+              <a:gd name="adj" fmla="val 8000"/>
+            </a:avLst>
           </a:prstGeom>
           <a:solidFill>
-            <a:srgbClr val="1B4F8A"/>
+            <a:srgbClr val="FFFFFF"/>
           </a:solidFill>
-          <a:ln>
-            <a:noFill/>
+          <a:ln w="19050">
+            <a:solidFill>
+              <a:srgbClr val="1B4F8A"/>
+            </a:solidFill>
           </a:ln>
         </p:spPr>
         <p:style>
@@ -4160,14 +4271,49 @@
       </p:sp>
       <p:sp>
         <p:nvSpPr>
-          <p:cNvPr id="29" name="TextBox 28"/>
+          <p:cNvPr id="32" name="TextBox 31"/>
           <p:cNvSpPr txBox="1"/>
           <p:nvPr/>
         </p:nvSpPr>
         <p:spPr>
           <a:xfrm>
-            <a:off x="9971532" y="3767327"/>
-            <a:ext cx="1188720" cy="256032"/>
+            <a:off x="9486900" y="3255264"/>
+            <a:ext cx="2157984" cy="201168"/>
+          </a:xfrm>
+          <a:prstGeom prst="rect">
+            <a:avLst/>
+          </a:prstGeom>
+          <a:noFill/>
+        </p:spPr>
+        <p:txBody>
+          <a:bodyPr wrap="square">
+            <a:spAutoFit/>
+          </a:bodyPr>
+          <a:lstStyle/>
+          <a:p>
+            <a:pPr algn="ctr">
+              <a:defRPr sz="800" b="1" i="0">
+                <a:solidFill>
+                  <a:srgbClr val="1B4F8A"/>
+                </a:solidFill>
+              </a:defRPr>
+            </a:pPr>
+            <a:r>
+              <a:t>Existing Users</a:t>
+            </a:r>
+          </a:p>
+        </p:txBody>
+      </p:sp>
+      <p:sp>
+        <p:nvSpPr>
+          <p:cNvPr id="33" name="TextBox 32"/>
+          <p:cNvSpPr txBox="1"/>
+          <p:nvPr/>
+        </p:nvSpPr>
+        <p:spPr>
+          <a:xfrm>
+            <a:off x="9486900" y="3456432"/>
+            <a:ext cx="2157984" cy="320040"/>
           </a:xfrm>
           <a:prstGeom prst="rect">
             <a:avLst/>
@@ -4188,34 +4334,65 @@
               </a:defRPr>
             </a:pPr>
             <a:r>
-              <a:t>EO March 27</a:t>
-            </a:r>
-          </a:p>
-        </p:txBody>
-      </p:sp>
-      <p:sp>
-        <p:nvSpPr>
-          <p:cNvPr id="30" name="Rounded Rectangle 29"/>
+              <a:t>Deprecation of old Open API</a:t>
+            </a:r>
+          </a:p>
+        </p:txBody>
+      </p:sp>
+      <p:sp>
+        <p:nvSpPr>
+          <p:cNvPr id="34" name="TextBox 33"/>
+          <p:cNvSpPr txBox="1"/>
+          <p:nvPr/>
+        </p:nvSpPr>
+        <p:spPr>
+          <a:xfrm>
+            <a:off x="9486900" y="3767328"/>
+            <a:ext cx="2157984" cy="347472"/>
+          </a:xfrm>
+          <a:prstGeom prst="rect">
+            <a:avLst/>
+          </a:prstGeom>
+          <a:noFill/>
+        </p:spPr>
+        <p:txBody>
+          <a:bodyPr wrap="square">
+            <a:spAutoFit/>
+          </a:bodyPr>
+          <a:lstStyle/>
+          <a:p>
+            <a:pPr algn="ctr">
+              <a:defRPr sz="800" b="0" i="1">
+                <a:solidFill>
+                  <a:srgbClr val="1E293B"/>
+                </a:solidFill>
+              </a:defRPr>
+            </a:pPr>
+            <a:r>
+              <a:t>End of deprecation period for old OAPI</a:t>
+            </a:r>
+          </a:p>
+        </p:txBody>
+      </p:sp>
+      <p:sp>
+        <p:nvSpPr>
+          <p:cNvPr id="35" name="Rectangle 34"/>
           <p:cNvSpPr/>
           <p:nvPr/>
         </p:nvSpPr>
         <p:spPr>
           <a:xfrm>
-            <a:off x="9377172" y="4251959"/>
-            <a:ext cx="2377440" cy="868680"/>
-          </a:xfrm>
-          <a:prstGeom prst="roundRect">
-            <a:avLst>
-              <a:gd name="adj" fmla="val 8000"/>
-            </a:avLst>
+            <a:off x="4114800" y="5989320"/>
+            <a:ext cx="182880" cy="182880"/>
+          </a:xfrm>
+          <a:prstGeom prst="rect">
+            <a:avLst/>
           </a:prstGeom>
           <a:solidFill>
-            <a:srgbClr val="FFFFFF"/>
+            <a:srgbClr val="2E9E5B"/>
           </a:solidFill>
-          <a:ln w="19050">
-            <a:solidFill>
-              <a:srgbClr val="1B4F8A"/>
-            </a:solidFill>
+          <a:ln>
+            <a:noFill/>
           </a:ln>
         </p:spPr>
         <p:style>
@@ -4242,14 +4419,14 @@
       </p:sp>
       <p:sp>
         <p:nvSpPr>
-          <p:cNvPr id="31" name="TextBox 30"/>
+          <p:cNvPr id="36" name="TextBox 35"/>
           <p:cNvSpPr txBox="1"/>
           <p:nvPr/>
         </p:nvSpPr>
         <p:spPr>
           <a:xfrm>
-            <a:off x="9486900" y="4325111"/>
-            <a:ext cx="2157984" cy="320040"/>
+            <a:off x="4389120" y="5943600"/>
+            <a:ext cx="1828800" cy="274320"/>
           </a:xfrm>
           <a:prstGeom prst="rect">
             <a:avLst/>
@@ -4262,70 +4439,35 @@
           </a:bodyPr>
           <a:lstStyle/>
           <a:p>
-            <a:pPr algn="ctr">
-              <a:defRPr sz="900" b="1" i="0">
-                <a:solidFill>
-                  <a:srgbClr val="1B4F8A"/>
-                </a:solidFill>
-              </a:defRPr>
-            </a:pPr>
-            <a:r>
-              <a:t>Deprecation of old Open API</a:t>
-            </a:r>
-          </a:p>
-        </p:txBody>
-      </p:sp>
-      <p:sp>
-        <p:nvSpPr>
-          <p:cNvPr id="32" name="TextBox 31"/>
-          <p:cNvSpPr txBox="1"/>
-          <p:nvPr/>
-        </p:nvSpPr>
-        <p:spPr>
-          <a:xfrm>
-            <a:off x="9486900" y="4636007"/>
-            <a:ext cx="2157984" cy="438912"/>
-          </a:xfrm>
-          <a:prstGeom prst="rect">
-            <a:avLst/>
-          </a:prstGeom>
-          <a:noFill/>
-        </p:spPr>
-        <p:txBody>
-          <a:bodyPr wrap="square">
-            <a:spAutoFit/>
-          </a:bodyPr>
-          <a:lstStyle/>
-          <a:p>
-            <a:pPr algn="ctr">
-              <a:defRPr sz="800" b="0" i="1">
+            <a:pPr algn="l">
+              <a:defRPr sz="1000" b="0" i="0">
                 <a:solidFill>
                   <a:srgbClr val="1E293B"/>
                 </a:solidFill>
               </a:defRPr>
             </a:pPr>
             <a:r>
-              <a:t>End of deprecation period for old OAPI</a:t>
-            </a:r>
-          </a:p>
-        </p:txBody>
-      </p:sp>
-      <p:sp>
-        <p:nvSpPr>
-          <p:cNvPr id="33" name="Rectangle 32"/>
+              <a:t>New Users</a:t>
+            </a:r>
+          </a:p>
+        </p:txBody>
+      </p:sp>
+      <p:sp>
+        <p:nvSpPr>
+          <p:cNvPr id="37" name="Rectangle 36"/>
           <p:cNvSpPr/>
           <p:nvPr/>
         </p:nvSpPr>
         <p:spPr>
           <a:xfrm>
-            <a:off x="4114800" y="5989320"/>
+            <a:off x="6400800" y="5989320"/>
             <a:ext cx="182880" cy="182880"/>
           </a:xfrm>
           <a:prstGeom prst="rect">
             <a:avLst/>
           </a:prstGeom>
           <a:solidFill>
-            <a:srgbClr val="2E9E5B"/>
+            <a:srgbClr val="1B4F8A"/>
           </a:solidFill>
           <a:ln>
             <a:noFill/>
@@ -4355,13 +4497,13 @@
       </p:sp>
       <p:sp>
         <p:nvSpPr>
-          <p:cNvPr id="34" name="TextBox 33"/>
+          <p:cNvPr id="38" name="TextBox 37"/>
           <p:cNvSpPr txBox="1"/>
           <p:nvPr/>
         </p:nvSpPr>
         <p:spPr>
           <a:xfrm>
-            <a:off x="4389120" y="5943600"/>
+            <a:off x="6675120" y="5943600"/>
             <a:ext cx="1828800" cy="274320"/>
           </a:xfrm>
           <a:prstGeom prst="rect">
@@ -4383,84 +4525,6 @@
               </a:defRPr>
             </a:pPr>
             <a:r>
-              <a:t>New Users</a:t>
-            </a:r>
-          </a:p>
-        </p:txBody>
-      </p:sp>
-      <p:sp>
-        <p:nvSpPr>
-          <p:cNvPr id="35" name="Rectangle 34"/>
-          <p:cNvSpPr/>
-          <p:nvPr/>
-        </p:nvSpPr>
-        <p:spPr>
-          <a:xfrm>
-            <a:off x="6400800" y="5989320"/>
-            <a:ext cx="182880" cy="182880"/>
-          </a:xfrm>
-          <a:prstGeom prst="rect">
-            <a:avLst/>
-          </a:prstGeom>
-          <a:solidFill>
-            <a:srgbClr val="1B4F8A"/>
-          </a:solidFill>
-          <a:ln>
-            <a:noFill/>
-          </a:ln>
-        </p:spPr>
-        <p:style>
-          <a:lnRef idx="1">
-            <a:schemeClr val="accent1"/>
-          </a:lnRef>
-          <a:fillRef idx="3">
-            <a:schemeClr val="accent1"/>
-          </a:fillRef>
-          <a:effectRef idx="2">
-            <a:schemeClr val="accent1"/>
-          </a:effectRef>
-          <a:fontRef idx="minor">
-            <a:schemeClr val="lt1"/>
-          </a:fontRef>
-        </p:style>
-        <p:txBody>
-          <a:bodyPr rtlCol="0" anchor="ctr"/>
-          <a:lstStyle/>
-          <a:p>
-            <a:pPr algn="ctr"/>
-          </a:p>
-        </p:txBody>
-      </p:sp>
-      <p:sp>
-        <p:nvSpPr>
-          <p:cNvPr id="36" name="TextBox 35"/>
-          <p:cNvSpPr txBox="1"/>
-          <p:nvPr/>
-        </p:nvSpPr>
-        <p:spPr>
-          <a:xfrm>
-            <a:off x="6675120" y="5943600"/>
-            <a:ext cx="1828800" cy="274320"/>
-          </a:xfrm>
-          <a:prstGeom prst="rect">
-            <a:avLst/>
-          </a:prstGeom>
-          <a:noFill/>
-        </p:spPr>
-        <p:txBody>
-          <a:bodyPr wrap="square">
-            <a:spAutoFit/>
-          </a:bodyPr>
-          <a:lstStyle/>
-          <a:p>
-            <a:pPr algn="l">
-              <a:defRPr sz="1000" b="0" i="0">
-                <a:solidFill>
-                  <a:srgbClr val="1E293B"/>
-                </a:solidFill>
-              </a:defRPr>
-            </a:pPr>
-            <a:r>
               <a:t>Existing Users</a:t>
             </a:r>
           </a:p>
@@ -4468,7 +4532,7 @@
       </p:sp>
       <p:sp>
         <p:nvSpPr>
-          <p:cNvPr id="37" name="TextBox 36"/>
+          <p:cNvPr id="39" name="TextBox 38"/>
           <p:cNvSpPr txBox="1"/>
           <p:nvPr/>
         </p:nvSpPr>
@@ -4503,7 +4567,7 @@
       </p:sp>
       <p:sp>
         <p:nvSpPr>
-          <p:cNvPr id="38" name="TextBox 37"/>
+          <p:cNvPr id="40" name="TextBox 39"/>
           <p:cNvSpPr txBox="1"/>
           <p:nvPr/>
         </p:nvSpPr>
